--- a/Sem 3/Data Structures/Theory/Lecture 1.pptx
+++ b/Sem 3/Data Structures/Theory/Lecture 1.pptx
@@ -295,7 +295,7 @@
       </p15:sldGuideLst>
     </p:ext>
     <p:ext uri="http://customooxmlschemas.google.com/">
-      <go:slidesCustomData xmlns="" xmlns:mc="http://schemas.openxmlformats.org/markup-compatibility/2006" xmlns:mv="urn:schemas-microsoft-com:mac:vml" xmlns:c="http://schemas.openxmlformats.org/drawingml/2006/chart" xmlns:dgm="http://schemas.openxmlformats.org/drawingml/2006/diagram" xmlns:o="urn:schemas-microsoft-com:office:office" xmlns:v="urn:schemas-microsoft-com:vml" xmlns:pvml="urn:schemas-microsoft-com:office:powerpoint" xmlns:com="http://schemas.openxmlformats.org/drawingml/2006/compatibility" xmlns:p14="http://schemas.microsoft.com/office/powerpoint/2010/main" xmlns:p15="http://schemas.microsoft.com/office/powerpoint/2012/main" xmlns:ahyp="http://schemas.microsoft.com/office/drawing/2018/hyperlinkcolor" xmlns:go="http://customooxmlschemas.google.com/" r:id="rId38" roundtripDataSignature="AMtx7mhjOyshAK8jPtu1/jxFNoHC2YxUmw=="/>
+      <go:slidesCustomData xmlns:go="http://customooxmlschemas.google.com/" xmlns:ahyp="http://schemas.microsoft.com/office/drawing/2018/hyperlinkcolor" xmlns:p15="http://schemas.microsoft.com/office/powerpoint/2012/main" xmlns:p14="http://schemas.microsoft.com/office/powerpoint/2010/main" xmlns:com="http://schemas.openxmlformats.org/drawingml/2006/compatibility" xmlns:pvml="urn:schemas-microsoft-com:office:powerpoint" xmlns:v="urn:schemas-microsoft-com:vml" xmlns:o="urn:schemas-microsoft-com:office:office" xmlns:dgm="http://schemas.openxmlformats.org/drawingml/2006/diagram" xmlns:c="http://schemas.openxmlformats.org/drawingml/2006/chart" xmlns:mv="urn:schemas-microsoft-com:mac:vml" xmlns:mc="http://schemas.openxmlformats.org/markup-compatibility/2006" xmlns="" r:id="rId38" roundtripDataSignature="AMtx7mhjOyshAK8jPtu1/jxFNoHC2YxUmw=="/>
     </p:ext>
   </p:extLst>
 </p:presentation>
@@ -25273,7 +25273,7 @@
           <p:nvPr>
             <p:extLst>
               <p:ext uri="{D42A27DB-BD31-4B8C-83A1-F6EECF244321}">
-                <p14:modId xmlns:p14="http://schemas.microsoft.com/office/powerpoint/2010/main" val="52710802"/>
+                <p14:modId xmlns:p14="http://schemas.microsoft.com/office/powerpoint/2010/main" val="588016845"/>
               </p:ext>
             </p:extLst>
           </p:nvPr>
@@ -25686,21 +25686,7 @@
                           <a:effectLst/>
                           <a:latin typeface="+mj-lt"/>
                         </a:rPr>
-                        <a:t>Runtime </a:t>
-                      </a:r>
-                      <a:r>
-                        <a:rPr lang="en-US" sz="1400" u="none" strike="noStrike" dirty="0" err="1">
-                          <a:effectLst/>
-                          <a:latin typeface="+mj-lt"/>
-                        </a:rPr>
-                        <a:t>overheand</a:t>
-                      </a:r>
-                      <a:r>
-                        <a:rPr lang="en-US" sz="1400" u="none" strike="noStrike" dirty="0">
-                          <a:effectLst/>
-                          <a:latin typeface="+mj-lt"/>
-                        </a:rPr>
-                        <a:t> for allocation and deallocation of memory; </a:t>
+                        <a:t>Runtime overhead for allocation and deallocation of memory; </a:t>
                       </a:r>
                     </a:p>
                     <a:p>
